--- a/docs/sales/decks/How-you-work-SOP.pptx
+++ b/docs/sales/decks/How-you-work-SOP.pptx
@@ -1221,7 +1221,7 @@
           <a:p>
             <a:r>
               <a:rPr lang="en-US" dirty="0"/>
-              <a:t>Rule 1 is the one reps care about once they understand it: nobody can quietly adjust their commission either.</a:t>
+              <a:t>Lead with rule 1 — it is the one that lands, because it protects THEM. Do not read these out like a policy; the point of the slide is that nobody has to remember any of it.</a:t>
             </a:r>
             <a:endParaRPr lang="en-US" dirty="0"/>
           </a:p>
@@ -6413,7 +6413,7 @@
                 <a:ea typeface="Cambria" pitchFamily="34" charset="-122"/>
                 <a:cs typeface="Cambria" pitchFamily="34" charset="-120"/>
               </a:rPr>
-              <a:t>Five rules that are not negotiable</a:t>
+              <a:t>Five things you can't get wrong</a:t>
             </a:r>
             <a:endParaRPr lang="en-US" sz="3600" dirty="0"/>
           </a:p>
@@ -6452,7 +6452,7 @@
                 <a:ea typeface="Calibri" pitchFamily="34" charset="-122"/>
                 <a:cs typeface="Calibri" pitchFamily="34" charset="-120"/>
               </a:rPr>
-              <a:t>These are enforced in code, not by trust. You cannot breach them by accident.</a:t>
+              <a:t>Not because we're watching — because the software won't let you. You don't have to memorise any of it.</a:t>
             </a:r>
             <a:endParaRPr lang="en-US" sz="1500" dirty="0"/>
           </a:p>
@@ -6550,7 +6550,7 @@
                 <a:ea typeface="Calibri" pitchFamily="34" charset="-122"/>
                 <a:cs typeface="Calibri" pitchFamily="34" charset="-120"/>
               </a:rPr>
-              <a:t>You cannot write to your own commission</a:t>
+              <a:t>Nobody can touch your commission — including us</a:t>
             </a:r>
             <a:endParaRPr lang="en-US" sz="1700" dirty="0"/>
           </a:p>
@@ -6589,7 +6589,7 @@
                 <a:ea typeface="Calibri" pitchFamily="34" charset="-122"/>
                 <a:cs typeface="Calibri" pitchFamily="34" charset="-120"/>
               </a:rPr>
-              <a:t>Attribution, payouts and subscriptions refuse every write from a rep account. You cannot pay yourself and you cannot correct your own record. This protects you as much as us.</a:t>
+              <a:t>Your attribution and payouts refuse every write from a rep account. That cuts both ways: you can't adjust your own record, and neither can anybody else quietly adjust it for you.</a:t>
             </a:r>
             <a:endParaRPr lang="en-US" sz="1300" dirty="0"/>
           </a:p>
@@ -6687,7 +6687,7 @@
                 <a:ea typeface="Calibri" pitchFamily="34" charset="-122"/>
                 <a:cs typeface="Calibri" pitchFamily="34" charset="-120"/>
               </a:rPr>
-              <a:t>An opt-out is final</a:t>
+              <a:t>If somebody says stop, we stop</a:t>
             </a:r>
             <a:endParaRPr lang="en-US" sz="1700" dirty="0"/>
           </a:p>
@@ -6726,7 +6726,7 @@
                 <a:ea typeface="Calibri" pitchFamily="34" charset="-122"/>
                 <a:cs typeface="Calibri" pitchFamily="34" charset="-120"/>
               </a:rPr>
-              <a:t>Once somebody says stop, only a superadmin can lift it, with a written reason.</a:t>
+              <a:t>A STOP text is recorded the second it lands and covers calls, texts and email — the dial button simply isn't there next time. You don't have to remember who said it. Undoing one takes a superadmin and a written reason, so it never happens by accident.</a:t>
             </a:r>
             <a:endParaRPr lang="en-US" sz="1300" dirty="0"/>
           </a:p>
@@ -6824,7 +6824,7 @@
                 <a:ea typeface="Calibri" pitchFamily="34" charset="-122"/>
                 <a:cs typeface="Calibri" pitchFamily="34" charset="-120"/>
               </a:rPr>
-              <a:t>You cannot self-attribute</a:t>
+              <a:t>You can't accidentally sign up your own company</a:t>
             </a:r>
             <a:endParaRPr lang="en-US" sz="1700" dirty="0"/>
           </a:p>
@@ -6863,7 +6863,7 @@
                 <a:ea typeface="Calibri" pitchFamily="34" charset="-122"/>
                 <a:cs typeface="Calibri" pitchFamily="34" charset="-120"/>
               </a:rPr>
-              <a:t>If your email matches the company, or you are a member of it, the system refuses before it checks anything else.</a:t>
+              <a:t>If your email matches the company, or you're already a member of it, the system says no before it checks anything else. It saves an awkward conversation three months later.</a:t>
             </a:r>
             <a:endParaRPr lang="en-US" sz="1300" dirty="0"/>
           </a:p>
@@ -6961,7 +6961,7 @@
                 <a:ea typeface="Calibri" pitchFamily="34" charset="-122"/>
                 <a:cs typeface="Calibri" pitchFamily="34" charset="-120"/>
               </a:rPr>
-              <a:t>Every note you write is readable</a:t>
+              <a:t>Write notes like a colleague will read them</a:t>
             </a:r>
             <a:endParaRPr lang="en-US" sz="1700" dirty="0"/>
           </a:p>
@@ -7000,7 +7000,7 @@
                 <a:ea typeface="Calibri" pitchFamily="34" charset="-122"/>
                 <a:cs typeface="Calibri" pitchFamily="34" charset="-120"/>
               </a:rPr>
-              <a:t>Superadmins can read all of it, and the screen says so. There is no private space in the portal.</a:t>
+              <a:t>Because one will. Superadmins can see everything you write, and the screen tells you so rather than letting you find out.</a:t>
             </a:r>
             <a:endParaRPr lang="en-US" sz="1300" dirty="0"/>
           </a:p>
@@ -7098,7 +7098,7 @@
                 <a:ea typeface="Calibri" pitchFamily="34" charset="-122"/>
                 <a:cs typeface="Calibri" pitchFamily="34" charset="-120"/>
               </a:rPr>
-              <a:t>The prospect's rules govern</a:t>
+              <a:t>The prospect's rules win, not yours</a:t>
             </a:r>
             <a:endParaRPr lang="en-US" sz="1700" dirty="0"/>
           </a:p>
@@ -7137,7 +7137,7 @@
                 <a:ea typeface="Calibri" pitchFamily="34" charset="-122"/>
                 <a:cs typeface="Calibri" pitchFamily="34" charset="-120"/>
               </a:rPr>
-              <a:t>Whichever country the prospect is in decides what is legal — not where you are sitting.</a:t>
+              <a:t>Wherever they are decides what's legal — the hours you may ring, the registrations we need. The screen works it out and just won't offer you the button outside it.</a:t>
             </a:r>
             <a:endParaRPr lang="en-US" sz="1300" dirty="0"/>
           </a:p>
@@ -10495,7 +10495,7 @@
                 <a:ea typeface="Calibri" pitchFamily="34" charset="-122"/>
                 <a:cs typeface="Calibri" pitchFamily="34" charset="-120"/>
               </a:rPr>
-              <a:t>Permanent, and it needs a written reason. Only a superadmin can ever lift it — not you.</a:t>
+              <a:t>That one sticks. It covers calls, texts and email, and the dial button won't be there. Undoing it takes a superadmin and a written reason — so if it looks wrong, say so rather than working around it.</a:t>
             </a:r>
             <a:endParaRPr lang="en-US" sz="1400" dirty="0"/>
           </a:p>
